--- a/vta/slides/Module_7_Alarms_Troubleshooting.pptx
+++ b/vta/slides/Module_7_Alarms_Troubleshooting.pptx
@@ -2059,7 +2059,7 @@
                 <a:ea typeface="Calibri" pitchFamily="34" charset="-122"/>
                 <a:cs typeface="Calibri" pitchFamily="34" charset="-120"/>
               </a:rPr>
-              <a:t>Day 2 · Application</a:t>
+              <a:t>Application</a:t>
             </a:r>
             <a:pPr indent="0" marL="0">
               <a:buNone/>
@@ -2073,7 +2073,7 @@
                 <a:ea typeface="Calibri" pitchFamily="34" charset="-122"/>
                 <a:cs typeface="Calibri" pitchFamily="34" charset="-120"/>
               </a:rPr>
-              <a:t>   ·   ~55 min   ·   7 lessons</a:t>
+              <a:t>   ·   7 lessons</a:t>
             </a:r>
             <a:endParaRPr lang="en-US" sz="1300" dirty="0"/>
           </a:p>
@@ -2636,7 +2636,9 @@
       </p:sp>
       <p:sp>
         <p:nvSpPr>
-          <p:cNvPr id="14" name="Text 12"/>
+          <p:cNvPr id="14" name="Text 12">
+            <a:hlinkClick r:id="rId1" tooltip="Open this module's simulator mission"/>
+          </p:cNvPr>
           <p:cNvSpPr/>
           <p:nvPr/>
         </p:nvSpPr>
@@ -2659,13 +2661,20 @@
               <a:buNone/>
             </a:pPr>
             <a:r>
-              <a:rPr lang="en-US" sz="1700" b="1" dirty="0">
+              <a:rPr lang="en-US" sz="1700" b="1" u="sng" dirty="0">
                 <a:solidFill>
                   <a:srgbClr val="FFFFFF"/>
                 </a:solidFill>
                 <a:latin typeface="Calibri" pitchFamily="34" charset="0"/>
                 <a:ea typeface="Calibri" pitchFamily="34" charset="-122"/>
                 <a:cs typeface="Calibri" pitchFamily="34" charset="-120"/>
+                <a:hlinkClick r:id="rId1" invalidUrl="" action="" tgtFrame="" tooltip="Open this module's simulator mission" history="1" highlightClick="0" endSnd="0">
+                  <a:extLst>
+                    <a:ext uri="{A12FA001-AC4F-418D-AE19-62706E023703}">
+                      <ahyp:hlinkClr xmlns:ahyp="http://schemas.microsoft.com/office/drawing/2018/hyperlinkcolor" val="tx"/>
+                    </a:ext>
+                  </a:extLst>
+                </a:hlinkClick>
               </a:rPr>
               <a:t>LTV 1200 Simulator</a:t>
             </a:r>
@@ -2698,13 +2707,20 @@
               <a:buNone/>
             </a:pPr>
             <a:r>
-              <a:rPr lang="en-US" sz="1250" dirty="0">
-                <a:solidFill>
-                  <a:srgbClr val="A9C2E0"/>
-                </a:solidFill>
-                <a:latin typeface="Calibri" pitchFamily="34" charset="0"/>
-                <a:ea typeface="Calibri" pitchFamily="34" charset="-122"/>
-                <a:cs typeface="Calibri" pitchFamily="34" charset="-120"/>
+              <a:rPr lang="en-US" sz="1250" u="sng" dirty="0">
+                <a:solidFill>
+                  <a:srgbClr val="7FB0E6"/>
+                </a:solidFill>
+                <a:latin typeface="Calibri" pitchFamily="34" charset="0"/>
+                <a:ea typeface="Calibri" pitchFamily="34" charset="-122"/>
+                <a:cs typeface="Calibri" pitchFamily="34" charset="-120"/>
+                <a:hlinkClick r:id="rId2" invalidUrl="" action="" tgtFrame="" tooltip="" history="1" highlightClick="0" endSnd="0">
+                  <a:extLst>
+                    <a:ext uri="{A12FA001-AC4F-418D-AE19-62706E023703}">
+                      <ahyp:hlinkClr xmlns:ahyp="http://schemas.microsoft.com/office/drawing/2018/hyperlinkcolor" val="tx"/>
+                    </a:ext>
+                  </a:extLst>
+                </a:hlinkClick>
               </a:rPr>
               <a:t>vent-ltv1200.html?level=2  —  Test yourself on the simulator's clinical scenarios — set alarm limits and correct the…</a:t>
             </a:r>
@@ -4377,7 +4393,7 @@
         <p:spPr>
           <a:xfrm>
             <a:off x="548640" y="2148840"/>
-            <a:ext cx="6309360" cy="4114800"/>
+            <a:ext cx="6309360" cy="4160520"/>
           </a:xfrm>
           <a:prstGeom prst="rect">
             <a:avLst/>
@@ -4394,7 +4410,7 @@
                 <a:spcPct val="100000"/>
               </a:lnSpc>
               <a:spcAft>
-                <a:spcPts val="900"/>
+                <a:spcPts val="1000"/>
               </a:spcAft>
               <a:buSzPct val="100000"/>
               <a:buChar char="•"/>
@@ -4408,7 +4424,7 @@
                 <a:ea typeface="Calibri" pitchFamily="34" charset="-122"/>
                 <a:cs typeface="Calibri" pitchFamily="34" charset="-120"/>
               </a:rPr>
-              <a:t>Alarms are NOT nuisances.</a:t>
+              <a:t>Alarms are NOT nuisances. They are information about a deteriorating system. Two kinds: equipment alarms (machine problem) and patient alarms (patient problem). Some are both.</a:t>
             </a:r>
             <a:endParaRPr lang="en-US" sz="1550" dirty="0"/>
           </a:p>
@@ -4418,7 +4434,7 @@
                 <a:spcPct val="100000"/>
               </a:lnSpc>
               <a:spcAft>
-                <a:spcPts val="900"/>
+                <a:spcPts val="1000"/>
               </a:spcAft>
               <a:buSzPct val="100000"/>
               <a:buChar char="•"/>
@@ -4432,7 +4448,7 @@
                 <a:ea typeface="Calibri" pitchFamily="34" charset="-122"/>
                 <a:cs typeface="Calibri" pitchFamily="34" charset="-120"/>
               </a:rPr>
-              <a:t>The cardinal rule: READ the alarm before you SILENCE it.</a:t>
+              <a:t>The cardinal rule: READ the alarm before you SILENCE it. Silencing an alarm without identifying the cause is a sentinel-level safety event, documented in nearly every transport-service incident review.</a:t>
             </a:r>
             <a:endParaRPr lang="en-US" sz="1550" dirty="0"/>
           </a:p>
@@ -4442,7 +4458,7 @@
                 <a:spcPct val="100000"/>
               </a:lnSpc>
               <a:spcAft>
-                <a:spcPts val="900"/>
+                <a:spcPts val="1000"/>
               </a:spcAft>
               <a:buSzPct val="100000"/>
               <a:buChar char="•"/>
@@ -4456,7 +4472,7 @@
                 <a:ea typeface="Calibri" pitchFamily="34" charset="-122"/>
                 <a:cs typeface="Calibri" pitchFamily="34" charset="-120"/>
               </a:rPr>
-              <a:t>Silence gives you 60 seconds of quiet to fix.</a:t>
+              <a:t>Silence gives you 60 seconds of quiet to fix. Not 60 seconds to ignore. After 60 sec, if the problem persists, the alarm re-fires.</a:t>
             </a:r>
             <a:endParaRPr lang="en-US" sz="1550" dirty="0"/>
           </a:p>
@@ -4466,7 +4482,7 @@
                 <a:spcPct val="100000"/>
               </a:lnSpc>
               <a:spcAft>
-                <a:spcPts val="900"/>
+                <a:spcPts val="1000"/>
               </a:spcAft>
               <a:buSzPct val="100000"/>
               <a:buChar char="•"/>
@@ -4480,7 +4496,7 @@
                 <a:ea typeface="Calibri" pitchFamily="34" charset="-122"/>
                 <a:cs typeface="Calibri" pitchFamily="34" charset="-120"/>
               </a:rPr>
-              <a:t>Build the habit: read first, silence second, fix third, document fourth.</a:t>
+              <a:t>Build the habit: read first, silence second, fix third, document fourth. Train it until it's automatic.</a:t>
             </a:r>
             <a:endParaRPr lang="en-US" sz="1550" dirty="0"/>
           </a:p>
@@ -4789,7 +4805,7 @@
         <p:spPr>
           <a:xfrm>
             <a:off x="548640" y="2148840"/>
-            <a:ext cx="10058400" cy="4114800"/>
+            <a:ext cx="10058400" cy="4160520"/>
           </a:xfrm>
           <a:prstGeom prst="rect">
             <a:avLst/>
@@ -4806,13 +4822,13 @@
                 <a:spcPct val="100000"/>
               </a:lnSpc>
               <a:spcAft>
-                <a:spcPts val="900"/>
+                <a:spcPts val="800"/>
               </a:spcAft>
               <a:buSzPct val="100000"/>
               <a:buChar char="•"/>
             </a:pPr>
             <a:r>
-              <a:rPr lang="en-US" sz="1550" dirty="0">
+              <a:rPr lang="en-US" sz="1450" dirty="0">
                 <a:solidFill>
                   <a:srgbClr val="1B2433"/>
                 </a:solidFill>
@@ -4820,9 +4836,9 @@
                 <a:ea typeface="Calibri" pitchFamily="34" charset="-122"/>
                 <a:cs typeface="Calibri" pitchFamily="34" charset="-120"/>
               </a:rPr>
-              <a:t>Most common cause of sudden vent crisis in transport.</a:t>
-            </a:r>
-            <a:endParaRPr lang="en-US" sz="1550" dirty="0"/>
+              <a:t>Most common cause of sudden vent crisis in transport. Movement during loading, lifting, transferring between gurney and aircraft, or a road bump can dislodge an ETT.</a:t>
+            </a:r>
+            <a:endParaRPr lang="en-US" sz="1450" dirty="0"/>
           </a:p>
           <a:p>
             <a:pPr marL="177800" indent="-177800">
@@ -4830,13 +4846,13 @@
                 <a:spcPct val="100000"/>
               </a:lnSpc>
               <a:spcAft>
-                <a:spcPts val="900"/>
+                <a:spcPts val="800"/>
               </a:spcAft>
               <a:buSzPct val="100000"/>
               <a:buChar char="•"/>
             </a:pPr>
             <a:r>
-              <a:rPr lang="en-US" sz="1550" dirty="0">
+              <a:rPr lang="en-US" sz="1450" dirty="0">
                 <a:solidFill>
                   <a:srgbClr val="1B2433"/>
                 </a:solidFill>
@@ -4846,7 +4862,7 @@
               </a:rPr>
               <a:t>Confirm depth: marking at the lip should match what was secured (21 cm women, 23 cm men typically).</a:t>
             </a:r>
-            <a:endParaRPr lang="en-US" sz="1550" dirty="0"/>
+            <a:endParaRPr lang="en-US" sz="1450" dirty="0"/>
           </a:p>
           <a:p>
             <a:pPr marL="177800" indent="-177800">
@@ -4854,13 +4870,13 @@
                 <a:spcPct val="100000"/>
               </a:lnSpc>
               <a:spcAft>
-                <a:spcPts val="900"/>
+                <a:spcPts val="800"/>
               </a:spcAft>
               <a:buSzPct val="100000"/>
               <a:buChar char="•"/>
             </a:pPr>
             <a:r>
-              <a:rPr lang="en-US" sz="1550" dirty="0">
+              <a:rPr lang="en-US" sz="1450" dirty="0">
                 <a:solidFill>
                   <a:srgbClr val="1B2433"/>
                 </a:solidFill>
@@ -4870,7 +4886,7 @@
               </a:rPr>
               <a:t>Confirm capnography: a sudden drop to zero is dislodgement until proven otherwise.</a:t>
             </a:r>
-            <a:endParaRPr lang="en-US" sz="1550" dirty="0"/>
+            <a:endParaRPr lang="en-US" sz="1450" dirty="0"/>
           </a:p>
           <a:p>
             <a:pPr marL="177800" indent="-177800">
@@ -4878,13 +4894,13 @@
                 <a:spcPct val="100000"/>
               </a:lnSpc>
               <a:spcAft>
-                <a:spcPts val="900"/>
+                <a:spcPts val="800"/>
               </a:spcAft>
               <a:buSzPct val="100000"/>
               <a:buChar char="•"/>
             </a:pPr>
             <a:r>
-              <a:rPr lang="en-US" sz="1550" dirty="0">
+              <a:rPr lang="en-US" sz="1450" dirty="0">
                 <a:solidFill>
                   <a:srgbClr val="1B2433"/>
                 </a:solidFill>
@@ -4892,9 +4908,9 @@
                 <a:ea typeface="Calibri" pitchFamily="34" charset="-122"/>
                 <a:cs typeface="Calibri" pitchFamily="34" charset="-120"/>
               </a:rPr>
-              <a:t>Auscultate: equal bilateral breath sounds.</a:t>
-            </a:r>
-            <a:endParaRPr lang="en-US" sz="1550" dirty="0"/>
+              <a:t>Auscultate: equal bilateral breath sounds. Right-only = mainstem migration. Absent or epigastric = esophageal or completely out.</a:t>
+            </a:r>
+            <a:endParaRPr lang="en-US" sz="1450" dirty="0"/>
           </a:p>
           <a:p>
             <a:pPr marL="177800" indent="-177800">
@@ -4902,13 +4918,13 @@
                 <a:spcPct val="100000"/>
               </a:lnSpc>
               <a:spcAft>
-                <a:spcPts val="900"/>
+                <a:spcPts val="800"/>
               </a:spcAft>
               <a:buSzPct val="100000"/>
               <a:buChar char="•"/>
             </a:pPr>
             <a:r>
-              <a:rPr lang="en-US" sz="1550" dirty="0">
+              <a:rPr lang="en-US" sz="1450" dirty="0">
                 <a:solidFill>
                   <a:srgbClr val="1B2433"/>
                 </a:solidFill>
@@ -4916,9 +4932,9 @@
                 <a:ea typeface="Calibri" pitchFamily="34" charset="-122"/>
                 <a:cs typeface="Calibri" pitchFamily="34" charset="-120"/>
               </a:rPr>
-              <a:t>If the tube is out, bag with BVM + mask while preparing to re-intubate.</a:t>
-            </a:r>
-            <a:endParaRPr lang="en-US" sz="1550" dirty="0"/>
+              <a:t>If the tube is out, bag with BVM + mask while preparing to re-intubate. Verify depth AGAIN after every transition.</a:t>
+            </a:r>
+            <a:endParaRPr lang="en-US" sz="1450" dirty="0"/>
           </a:p>
         </p:txBody>
       </p:sp>
@@ -5080,7 +5096,7 @@
         <p:spPr>
           <a:xfrm>
             <a:off x="548640" y="2148840"/>
-            <a:ext cx="10058400" cy="4114800"/>
+            <a:ext cx="10058400" cy="4160520"/>
           </a:xfrm>
           <a:prstGeom prst="rect">
             <a:avLst/>
@@ -5097,7 +5113,7 @@
                 <a:spcPct val="100000"/>
               </a:lnSpc>
               <a:spcAft>
-                <a:spcPts val="900"/>
+                <a:spcPts val="1000"/>
               </a:spcAft>
               <a:buSzPct val="100000"/>
               <a:buChar char="•"/>
@@ -5121,7 +5137,7 @@
                 <a:spcPct val="100000"/>
               </a:lnSpc>
               <a:spcAft>
-                <a:spcPts val="900"/>
+                <a:spcPts val="1000"/>
               </a:spcAft>
               <a:buSzPct val="100000"/>
               <a:buChar char="•"/>
@@ -5135,7 +5151,7 @@
                 <a:ea typeface="Calibri" pitchFamily="34" charset="-122"/>
                 <a:cs typeface="Calibri" pitchFamily="34" charset="-120"/>
               </a:rPr>
-              <a:t>Pass a suction catheter.</a:t>
+              <a:t>Pass a suction catheter. This is BOTH diagnostic AND therapeutic. If it passes easily and brings back secretions, you've solved the problem.</a:t>
             </a:r>
             <a:endParaRPr lang="en-US" sz="1550" dirty="0"/>
           </a:p>
@@ -5145,7 +5161,7 @@
                 <a:spcPct val="100000"/>
               </a:lnSpc>
               <a:spcAft>
-                <a:spcPts val="900"/>
+                <a:spcPts val="1000"/>
               </a:spcAft>
               <a:buSzPct val="100000"/>
               <a:buChar char="•"/>
@@ -5169,7 +5185,7 @@
                 <a:spcPct val="100000"/>
               </a:lnSpc>
               <a:spcAft>
-                <a:spcPts val="900"/>
+                <a:spcPts val="1000"/>
               </a:spcAft>
               <a:buSzPct val="100000"/>
               <a:buChar char="•"/>
@@ -5183,7 +5199,7 @@
                 <a:ea typeface="Calibri" pitchFamily="34" charset="-122"/>
                 <a:cs typeface="Calibri" pitchFamily="34" charset="-120"/>
               </a:rPr>
-              <a:t>If suction doesn't pass — you have a fixed obstruction or dislodgement.</a:t>
+              <a:t>If suction doesn't pass — you have a fixed obstruction or dislodgement. Disconnect and bag while investigating.</a:t>
             </a:r>
             <a:endParaRPr lang="en-US" sz="1550" dirty="0"/>
           </a:p>
@@ -5347,7 +5363,7 @@
         <p:spPr>
           <a:xfrm>
             <a:off x="548640" y="2148840"/>
-            <a:ext cx="10058400" cy="4114800"/>
+            <a:ext cx="10058400" cy="4160520"/>
           </a:xfrm>
           <a:prstGeom prst="rect">
             <a:avLst/>
@@ -5364,7 +5380,7 @@
                 <a:spcPct val="100000"/>
               </a:lnSpc>
               <a:spcAft>
-                <a:spcPts val="900"/>
+                <a:spcPts val="1000"/>
               </a:spcAft>
               <a:buSzPct val="100000"/>
               <a:buChar char="•"/>
@@ -5378,7 +5394,7 @@
                 <a:ea typeface="Calibri" pitchFamily="34" charset="-122"/>
                 <a:cs typeface="Calibri" pitchFamily="34" charset="-120"/>
               </a:rPr>
-              <a:t>Sudden rise in PIP, often with falling SpO₂ and BP.</a:t>
+              <a:t>Sudden rise in PIP, often with falling SpO₂ and BP. Decreased or absent breath sounds on the affected side. Tracheal deviation away from the affected side (LATE).</a:t>
             </a:r>
             <a:endParaRPr lang="en-US" sz="1550" dirty="0"/>
           </a:p>
@@ -5388,7 +5404,7 @@
                 <a:spcPct val="100000"/>
               </a:lnSpc>
               <a:spcAft>
-                <a:spcPts val="900"/>
+                <a:spcPts val="1000"/>
               </a:spcAft>
               <a:buSzPct val="100000"/>
               <a:buChar char="•"/>
@@ -5402,7 +5418,7 @@
                 <a:ea typeface="Calibri" pitchFamily="34" charset="-122"/>
                 <a:cs typeface="Calibri" pitchFamily="34" charset="-120"/>
               </a:rPr>
-              <a:t>Hyperresonance to percussion of the affected side.</a:t>
+              <a:t>Hyperresonance to percussion of the affected side. JVD + hemodynamic compromise = TENSION pneumothorax. Clinical diagnosis at the bedside, not waiting for imaging.</a:t>
             </a:r>
             <a:endParaRPr lang="en-US" sz="1550" dirty="0"/>
           </a:p>
@@ -5412,7 +5428,7 @@
                 <a:spcPct val="100000"/>
               </a:lnSpc>
               <a:spcAft>
-                <a:spcPts val="900"/>
+                <a:spcPts val="1000"/>
               </a:spcAft>
               <a:buSzPct val="100000"/>
               <a:buChar char="•"/>
@@ -5426,7 +5442,7 @@
                 <a:ea typeface="Calibri" pitchFamily="34" charset="-122"/>
                 <a:cs typeface="Calibri" pitchFamily="34" charset="-120"/>
               </a:rPr>
-              <a:t>Decompress per protocol: needle thoracostomy at the 2nd ICS midclavicular OR 4th–5th ICS midaxillary.</a:t>
+              <a:t>Decompress per protocol: needle thoracostomy at the 2nd ICS midclavicular OR 4th–5th ICS midaxillary. Then chest seal / tube as appropriate.</a:t>
             </a:r>
             <a:endParaRPr lang="en-US" sz="1550" dirty="0"/>
           </a:p>
@@ -5436,7 +5452,7 @@
                 <a:spcPct val="100000"/>
               </a:lnSpc>
               <a:spcAft>
-                <a:spcPts val="900"/>
+                <a:spcPts val="1000"/>
               </a:spcAft>
               <a:buSzPct val="100000"/>
               <a:buChar char="•"/>
@@ -5450,7 +5466,7 @@
                 <a:ea typeface="Calibri" pitchFamily="34" charset="-122"/>
                 <a:cs typeface="Calibri" pitchFamily="34" charset="-120"/>
               </a:rPr>
-              <a:t>High-risk populations: asthma/COPD on positive pressure, trauma, recent central line placement.</a:t>
+              <a:t>High-risk populations: asthma/COPD on positive pressure, trauma, recent central line placement. Suspect early.</a:t>
             </a:r>
             <a:endParaRPr lang="en-US" sz="1550" dirty="0"/>
           </a:p>
@@ -5614,7 +5630,7 @@
         <p:spPr>
           <a:xfrm>
             <a:off x="548640" y="2148840"/>
-            <a:ext cx="10058400" cy="4114800"/>
+            <a:ext cx="10058400" cy="4160520"/>
           </a:xfrm>
           <a:prstGeom prst="rect">
             <a:avLst/>
@@ -5631,7 +5647,7 @@
                 <a:spcPct val="100000"/>
               </a:lnSpc>
               <a:spcAft>
-                <a:spcPts val="900"/>
+                <a:spcPts val="1000"/>
               </a:spcAft>
               <a:buSzPct val="100000"/>
               <a:buChar char="•"/>
@@ -5645,7 +5661,7 @@
                 <a:ea typeface="Calibri" pitchFamily="34" charset="-122"/>
                 <a:cs typeface="Calibri" pitchFamily="34" charset="-120"/>
               </a:rPr>
-              <a:t>Machine is the problem.</a:t>
+              <a:t>Machine is the problem. Causes: disconnected circuit (most often exhalation valve drive line), failed sensor or transducer, silent battery switch, O₂ source disconnect, software hang, loose ETT cuff.</a:t>
             </a:r>
             <a:endParaRPr lang="en-US" sz="1550" dirty="0"/>
           </a:p>
@@ -5655,7 +5671,7 @@
                 <a:spcPct val="100000"/>
               </a:lnSpc>
               <a:spcAft>
-                <a:spcPts val="900"/>
+                <a:spcPts val="1000"/>
               </a:spcAft>
               <a:buSzPct val="100000"/>
               <a:buChar char="•"/>
@@ -5669,7 +5685,7 @@
                 <a:ea typeface="Calibri" pitchFamily="34" charset="-122"/>
                 <a:cs typeface="Calibri" pitchFamily="34" charset="-120"/>
               </a:rPr>
-              <a:t>Universal answer: DISCONNECT FROM THE VENT AND BAG WITH 100% O₂.</a:t>
+              <a:t>Universal answer: DISCONNECT FROM THE VENT AND BAG WITH 100% O₂. The bag tells you whether the problem is patient or machine.</a:t>
             </a:r>
             <a:endParaRPr lang="en-US" sz="1550" dirty="0"/>
           </a:p>
@@ -5679,7 +5695,7 @@
                 <a:spcPct val="100000"/>
               </a:lnSpc>
               <a:spcAft>
-                <a:spcPts val="900"/>
+                <a:spcPts val="1000"/>
               </a:spcAft>
               <a:buSzPct val="100000"/>
               <a:buChar char="•"/>
@@ -5693,7 +5709,7 @@
                 <a:ea typeface="Calibri" pitchFamily="34" charset="-122"/>
                 <a:cs typeface="Calibri" pitchFamily="34" charset="-120"/>
               </a:rPr>
-              <a:t>Easy bag + sat rises = vent problem.</a:t>
+              <a:t>Easy bag + sat rises = vent problem. Troubleshoot vent off-patient. Hard bag = patient problem — apply DOPE (D, O, or P).</a:t>
             </a:r>
             <a:endParaRPr lang="en-US" sz="1550" dirty="0"/>
           </a:p>
@@ -5703,7 +5719,7 @@
                 <a:spcPct val="100000"/>
               </a:lnSpc>
               <a:spcAft>
-                <a:spcPts val="900"/>
+                <a:spcPts val="1000"/>
               </a:spcAft>
               <a:buSzPct val="100000"/>
               <a:buChar char="•"/>
@@ -5717,7 +5733,7 @@
                 <a:ea typeface="Calibri" pitchFamily="34" charset="-122"/>
                 <a:cs typeface="Calibri" pitchFamily="34" charset="-120"/>
               </a:rPr>
-              <a:t>Bagging is rarely the wrong answer.</a:t>
+              <a:t>Bagging is rarely the wrong answer. It is diagnostic AND therapeutic at the same time.</a:t>
             </a:r>
             <a:endParaRPr lang="en-US" sz="1550" dirty="0"/>
           </a:p>
@@ -5881,7 +5897,7 @@
         <p:spPr>
           <a:xfrm>
             <a:off x="548640" y="2148840"/>
-            <a:ext cx="6309360" cy="4114800"/>
+            <a:ext cx="6309360" cy="4160520"/>
           </a:xfrm>
           <a:prstGeom prst="rect">
             <a:avLst/>
@@ -5898,7 +5914,7 @@
                 <a:spcPct val="100000"/>
               </a:lnSpc>
               <a:spcAft>
-                <a:spcPts val="900"/>
+                <a:spcPts val="1000"/>
               </a:spcAft>
               <a:buSzPct val="100000"/>
               <a:buChar char="•"/>
@@ -5912,7 +5928,7 @@
                 <a:ea typeface="Calibri" pitchFamily="34" charset="-122"/>
                 <a:cs typeface="Calibri" pitchFamily="34" charset="-120"/>
               </a:rPr>
-              <a:t>If you cannot identify and fix an alarm in 10 seconds, disconnect from the ventilator and bag with 100% oxygen.</a:t>
+              <a:t>If you cannot identify and fix an alarm in 10 seconds, disconnect from the ventilator and bag with 100% oxygen. Then troubleshoot.</a:t>
             </a:r>
             <a:endParaRPr lang="en-US" sz="1550" dirty="0"/>
           </a:p>
@@ -5922,7 +5938,7 @@
                 <a:spcPct val="100000"/>
               </a:lnSpc>
               <a:spcAft>
-                <a:spcPts val="900"/>
+                <a:spcPts val="1000"/>
               </a:spcAft>
               <a:buSzPct val="100000"/>
               <a:buChar char="•"/>
@@ -5936,7 +5952,7 @@
                 <a:ea typeface="Calibri" pitchFamily="34" charset="-122"/>
                 <a:cs typeface="Calibri" pitchFamily="34" charset="-120"/>
               </a:rPr>
-              <a:t>Vented patients deteriorate fast — sats can drop 20 points in two minutes of failed ventilation.</a:t>
+              <a:t>Vented patients deteriorate fast — sats can drop 20 points in two minutes of failed ventilation. Bagging buys time.</a:t>
             </a:r>
             <a:endParaRPr lang="en-US" sz="1550" dirty="0"/>
           </a:p>
@@ -5946,7 +5962,7 @@
                 <a:spcPct val="100000"/>
               </a:lnSpc>
               <a:spcAft>
-                <a:spcPts val="900"/>
+                <a:spcPts val="1000"/>
               </a:spcAft>
               <a:buSzPct val="100000"/>
               <a:buChar char="•"/>
@@ -5960,7 +5976,7 @@
                 <a:ea typeface="Calibri" pitchFamily="34" charset="-122"/>
                 <a:cs typeface="Calibri" pitchFamily="34" charset="-120"/>
               </a:rPr>
-              <a:t>The bag gives you something the vent cannot: direct hands-on feedback.</a:t>
+              <a:t>The bag gives you something the vent cannot: direct hands-on feedback. You feel resistance. You see chest rise. You CONFIRM gas exchange.</a:t>
             </a:r>
             <a:endParaRPr lang="en-US" sz="1550" dirty="0"/>
           </a:p>
@@ -5970,7 +5986,7 @@
                 <a:spcPct val="100000"/>
               </a:lnSpc>
               <a:spcAft>
-                <a:spcPts val="900"/>
+                <a:spcPts val="1000"/>
               </a:spcAft>
               <a:buSzPct val="100000"/>
               <a:buChar char="•"/>
@@ -5984,7 +6000,7 @@
                 <a:ea typeface="Calibri" pitchFamily="34" charset="-122"/>
                 <a:cs typeface="Calibri" pitchFamily="34" charset="-120"/>
               </a:rPr>
-              <a:t>If bagging is easy and sat comes up, the problem is the machine.</a:t>
+              <a:t>If bagging is easy and sat comes up, the problem is the machine. If bagging is hard, the problem is the patient — DOPE. Bagging is rarely the wrong answer.</a:t>
             </a:r>
             <a:endParaRPr lang="en-US" sz="1550" dirty="0"/>
           </a:p>
@@ -6293,7 +6309,7 @@
         <p:spPr>
           <a:xfrm>
             <a:off x="548640" y="2148840"/>
-            <a:ext cx="10058400" cy="4114800"/>
+            <a:ext cx="10058400" cy="4160520"/>
           </a:xfrm>
           <a:prstGeom prst="rect">
             <a:avLst/>
@@ -6310,13 +6326,13 @@
                 <a:spcPct val="100000"/>
               </a:lnSpc>
               <a:spcAft>
-                <a:spcPts val="900"/>
+                <a:spcPts val="800"/>
               </a:spcAft>
               <a:buSzPct val="100000"/>
               <a:buChar char="•"/>
             </a:pPr>
             <a:r>
-              <a:rPr lang="en-US" sz="1550" dirty="0">
+              <a:rPr lang="en-US" sz="1450" dirty="0">
                 <a:solidFill>
                   <a:srgbClr val="1B2433"/>
                 </a:solidFill>
@@ -6324,9 +6340,9 @@
                 <a:ea typeface="Calibri" pitchFamily="34" charset="-122"/>
                 <a:cs typeface="Calibri" pitchFamily="34" charset="-120"/>
               </a:rPr>
-              <a:t>Patient-vent dyssynchrony affects ~25% of vented patients (Blanch, ICM 2015).</a:t>
-            </a:r>
-            <a:endParaRPr lang="en-US" sz="1550" dirty="0"/>
+              <a:t>Patient-vent dyssynchrony affects ~25% of vented patients (Blanch, ICM 2015). Four patterns:</a:t>
+            </a:r>
+            <a:endParaRPr lang="en-US" sz="1450" dirty="0"/>
           </a:p>
           <a:p>
             <a:pPr marL="177800" indent="-177800">
@@ -6334,13 +6350,13 @@
                 <a:spcPct val="100000"/>
               </a:lnSpc>
               <a:spcAft>
-                <a:spcPts val="900"/>
+                <a:spcPts val="800"/>
               </a:spcAft>
               <a:buSzPct val="100000"/>
               <a:buChar char="•"/>
             </a:pPr>
             <a:r>
-              <a:rPr lang="en-US" sz="1550" dirty="0">
+              <a:rPr lang="en-US" sz="1450" dirty="0">
                 <a:solidFill>
                   <a:srgbClr val="1B2433"/>
                 </a:solidFill>
@@ -6348,9 +6364,9 @@
                 <a:ea typeface="Calibri" pitchFamily="34" charset="-122"/>
                 <a:cs typeface="Calibri" pitchFamily="34" charset="-120"/>
               </a:rPr>
-              <a:t>Trigger asynchrony: patient effort doesn't initiate a breath.</a:t>
-            </a:r>
-            <a:endParaRPr lang="en-US" sz="1550" dirty="0"/>
+              <a:t>Trigger asynchrony: patient effort doesn't initiate a breath. Fix: increase trigger sensitivity (flow trigger if available).</a:t>
+            </a:r>
+            <a:endParaRPr lang="en-US" sz="1450" dirty="0"/>
           </a:p>
           <a:p>
             <a:pPr marL="177800" indent="-177800">
@@ -6358,13 +6374,13 @@
                 <a:spcPct val="100000"/>
               </a:lnSpc>
               <a:spcAft>
-                <a:spcPts val="900"/>
+                <a:spcPts val="800"/>
               </a:spcAft>
               <a:buSzPct val="100000"/>
               <a:buChar char="•"/>
             </a:pPr>
             <a:r>
-              <a:rPr lang="en-US" sz="1550" dirty="0">
+              <a:rPr lang="en-US" sz="1450" dirty="0">
                 <a:solidFill>
                   <a:srgbClr val="1B2433"/>
                 </a:solidFill>
@@ -6372,9 +6388,9 @@
                 <a:ea typeface="Calibri" pitchFamily="34" charset="-122"/>
                 <a:cs typeface="Calibri" pitchFamily="34" charset="-120"/>
               </a:rPr>
-              <a:t>Flow asynchrony: vent flow doesn't match patient demand.</a:t>
-            </a:r>
-            <a:endParaRPr lang="en-US" sz="1550" dirty="0"/>
+              <a:t>Flow asynchrony: vent flow doesn't match patient demand. Fix: increase peak flow or shorten inspiratory time.</a:t>
+            </a:r>
+            <a:endParaRPr lang="en-US" sz="1450" dirty="0"/>
           </a:p>
           <a:p>
             <a:pPr marL="177800" indent="-177800">
@@ -6382,13 +6398,13 @@
                 <a:spcPct val="100000"/>
               </a:lnSpc>
               <a:spcAft>
-                <a:spcPts val="900"/>
+                <a:spcPts val="800"/>
               </a:spcAft>
               <a:buSzPct val="100000"/>
               <a:buChar char="•"/>
             </a:pPr>
             <a:r>
-              <a:rPr lang="en-US" sz="1550" dirty="0">
+              <a:rPr lang="en-US" sz="1450" dirty="0">
                 <a:solidFill>
                   <a:srgbClr val="1B2433"/>
                 </a:solidFill>
@@ -6396,9 +6412,9 @@
                 <a:ea typeface="Calibri" pitchFamily="34" charset="-122"/>
                 <a:cs typeface="Calibri" pitchFamily="34" charset="-120"/>
               </a:rPr>
-              <a:t>Double triggering: patient effort outlasts inspiration; second breath stacks immediately.</a:t>
-            </a:r>
-            <a:endParaRPr lang="en-US" sz="1550" dirty="0"/>
+              <a:t>Double triggering: patient effort outlasts inspiration; second breath stacks immediately. Fix: lengthen inspiratory time, deepen sedation, treat air hunger.</a:t>
+            </a:r>
+            <a:endParaRPr lang="en-US" sz="1450" dirty="0"/>
           </a:p>
           <a:p>
             <a:pPr marL="177800" indent="-177800">
@@ -6406,13 +6422,13 @@
                 <a:spcPct val="100000"/>
               </a:lnSpc>
               <a:spcAft>
-                <a:spcPts val="900"/>
+                <a:spcPts val="800"/>
               </a:spcAft>
               <a:buSzPct val="100000"/>
               <a:buChar char="•"/>
             </a:pPr>
             <a:r>
-              <a:rPr lang="en-US" sz="1550" dirty="0">
+              <a:rPr lang="en-US" sz="1450" dirty="0">
                 <a:solidFill>
                   <a:srgbClr val="1B2433"/>
                 </a:solidFill>
@@ -6422,7 +6438,7 @@
               </a:rPr>
               <a:t>EMS bedside fix for most dyssynchrony: deepen sedation, ensure adequate analgesia, check trigger settings.</a:t>
             </a:r>
-            <a:endParaRPr lang="en-US" sz="1550" dirty="0"/>
+            <a:endParaRPr lang="en-US" sz="1450" dirty="0"/>
           </a:p>
         </p:txBody>
       </p:sp>

--- a/vta/slides/Module_7_Alarms_Troubleshooting.pptx
+++ b/vta/slides/Module_7_Alarms_Troubleshooting.pptx
@@ -1141,7 +1141,7 @@
               <a:rPr lang="en-US" dirty="0"/>
               <a:t>Sudden rise in PIP, often with falling SpO₂ and BP. Decreased or absent breath sounds on the affected side. Tracheal deviation away from the affected side (LATE).
 Hyperresonance to percussion of the affected side. JVD + hemodynamic compromise = TENSION pneumothorax. Clinical diagnosis at the bedside, not waiting for imaging.
-Decompress per protocol: needle thoracostomy at the 2nd ICS midclavicular OR 4th–5th ICS midaxillary. Then chest seal / tube as appropriate.
+Decompress per protocol: needle thoracostomy at the 2nd ICS midclavicular OR 4th–5th ICS midaxillary. Then secure and monitor the catheter/device per protocol, reassess for re-tensioning, and arrange definitive thoracostomy at the receiving facility. (A chest seal treats an OPEN chest wound — it does not stop an internal air leak.)
 High-risk populations: asthma/COPD on positive pressure, trauma, recent central line placement. Suspect early.</a:t>
             </a:r>
             <a:endParaRPr lang="en-US" dirty="0"/>
@@ -5442,7 +5442,7 @@
                 <a:ea typeface="Calibri" pitchFamily="34" charset="-122"/>
                 <a:cs typeface="Calibri" pitchFamily="34" charset="-120"/>
               </a:rPr>
-              <a:t>Decompress per protocol: needle thoracostomy at the 2nd ICS midclavicular OR 4th–5th ICS midaxillary. Then chest seal / tube as appropriate.</a:t>
+              <a:t>Decompress per protocol: needle thoracostomy at the 2nd ICS midclavicular OR 4th–5th ICS midaxillary.</a:t>
             </a:r>
             <a:endParaRPr lang="en-US" sz="1550" dirty="0"/>
           </a:p>

--- a/vta/slides/Module_7_Alarms_Troubleshooting.pptx
+++ b/vta/slides/Module_7_Alarms_Troubleshooting.pptx
@@ -4502,151 +4502,30 @@
           </a:p>
         </p:txBody>
       </p:sp>
-      <p:sp>
-        <p:nvSpPr>
-          <p:cNvPr id="6" name="Shape 4"/>
-          <p:cNvSpPr/>
-          <p:nvPr/>
-        </p:nvSpPr>
-        <p:spPr>
-          <a:xfrm>
-            <a:off x="7315200" y="2148840"/>
-            <a:ext cx="4325112" cy="3840480"/>
-          </a:xfrm>
-          <a:prstGeom prst="roundRect">
-            <a:avLst>
-              <a:gd name="adj" fmla="val 2381"/>
-            </a:avLst>
-          </a:prstGeom>
-          <a:solidFill>
-            <a:srgbClr val="FBEFDD"/>
-          </a:solidFill>
-          <a:ln/>
-        </p:spPr>
-      </p:sp>
-      <p:sp>
-        <p:nvSpPr>
-          <p:cNvPr id="7" name="Text 5"/>
-          <p:cNvSpPr/>
-          <p:nvPr/>
-        </p:nvSpPr>
-        <p:spPr>
-          <a:xfrm>
-            <a:off x="7589520" y="2377440"/>
-            <a:ext cx="3776472" cy="320040"/>
+      <p:pic>
+        <p:nvPicPr>
+          <p:cNvPr id="6" name="Image 0" descr="/tmp/claude-0/-home-user-amr-kc-protocols/883711fe-5eaa-500f-ae13-4d63d2ddcc7e/scratchpad/pngs/dope.png">    </p:cNvPr>
+          <p:cNvPicPr>
+            <a:picLocks noChangeAspect="1"/>
+          </p:cNvPicPr>
+          <p:nvPr/>
+        </p:nvPicPr>
+        <p:blipFill>
+          <a:blip r:embed="rId1"/>
+          <a:stretch>
+            <a:fillRect/>
+          </a:stretch>
+        </p:blipFill>
+        <p:spPr>
+          <a:xfrm>
+            <a:off x="7040880" y="2822048"/>
+            <a:ext cx="4709160" cy="1945423"/>
           </a:xfrm>
           <a:prstGeom prst="rect">
             <a:avLst/>
           </a:prstGeom>
-          <a:noFill/>
-          <a:ln/>
-        </p:spPr>
-        <p:txBody>
-          <a:bodyPr wrap="square" rtlCol="0" anchor="ctr"/>
-          <a:lstStyle/>
-          <a:p>
-            <a:pPr indent="0" marL="0">
-              <a:buNone/>
-            </a:pPr>
-            <a:r>
-              <a:rPr lang="en-US" sz="1200" b="1" spc="200" kern="0" dirty="0">
-                <a:solidFill>
-                  <a:srgbClr val="9C540B"/>
-                </a:solidFill>
-                <a:latin typeface="Calibri" pitchFamily="34" charset="0"/>
-                <a:ea typeface="Calibri" pitchFamily="34" charset="-122"/>
-                <a:cs typeface="Calibri" pitchFamily="34" charset="-120"/>
-              </a:rPr>
-              <a:t>CLINICAL PEARL</a:t>
-            </a:r>
-            <a:endParaRPr lang="en-US" sz="1200" dirty="0"/>
-          </a:p>
-        </p:txBody>
-      </p:sp>
-      <p:sp>
-        <p:nvSpPr>
-          <p:cNvPr id="8" name="Text 6"/>
-          <p:cNvSpPr/>
-          <p:nvPr/>
-        </p:nvSpPr>
-        <p:spPr>
-          <a:xfrm>
-            <a:off x="7589520" y="2715768"/>
-            <a:ext cx="3776472" cy="640080"/>
-          </a:xfrm>
-          <a:prstGeom prst="rect">
-            <a:avLst/>
-          </a:prstGeom>
-          <a:noFill/>
-          <a:ln/>
-        </p:spPr>
-        <p:txBody>
-          <a:bodyPr wrap="square" rtlCol="0" anchor="t"/>
-          <a:lstStyle/>
-          <a:p>
-            <a:pPr indent="0" marL="0">
-              <a:lnSpc>
-                <a:spcPct val="95000"/>
-              </a:lnSpc>
-              <a:buNone/>
-            </a:pPr>
-            <a:r>
-              <a:rPr lang="en-US" sz="1700" b="1" dirty="0">
-                <a:solidFill>
-                  <a:srgbClr val="173A68"/>
-                </a:solidFill>
-                <a:latin typeface="Cambria" pitchFamily="34" charset="0"/>
-                <a:ea typeface="Cambria" pitchFamily="34" charset="-122"/>
-                <a:cs typeface="Cambria" pitchFamily="34" charset="-120"/>
-              </a:rPr>
-              <a:t>Sentinel error</a:t>
-            </a:r>
-            <a:endParaRPr lang="en-US" sz="1700" dirty="0"/>
-          </a:p>
-        </p:txBody>
-      </p:sp>
-      <p:sp>
-        <p:nvSpPr>
-          <p:cNvPr id="9" name="Text 7"/>
-          <p:cNvSpPr/>
-          <p:nvPr/>
-        </p:nvSpPr>
-        <p:spPr>
-          <a:xfrm>
-            <a:off x="7589520" y="3474720"/>
-            <a:ext cx="3776472" cy="2286000"/>
-          </a:xfrm>
-          <a:prstGeom prst="rect">
-            <a:avLst/>
-          </a:prstGeom>
-          <a:noFill/>
-          <a:ln/>
-        </p:spPr>
-        <p:txBody>
-          <a:bodyPr wrap="square" rtlCol="0" anchor="t"/>
-          <a:lstStyle/>
-          <a:p>
-            <a:pPr indent="0" marL="0">
-              <a:lnSpc>
-                <a:spcPct val="103000"/>
-              </a:lnSpc>
-              <a:buNone/>
-            </a:pPr>
-            <a:r>
-              <a:rPr lang="en-US" sz="1350" dirty="0">
-                <a:solidFill>
-                  <a:srgbClr val="1B2433"/>
-                </a:solidFill>
-                <a:latin typeface="Calibri" pitchFamily="34" charset="0"/>
-                <a:ea typeface="Calibri" pitchFamily="34" charset="-122"/>
-                <a:cs typeface="Calibri" pitchFamily="34" charset="-120"/>
-              </a:rPr>
-              <a:t>Silencing without investigating is the #1 contributor to adverse vent events in transport. Don't let muscle memory take over.</a:t>
-            </a:r>
-            <a:endParaRPr lang="en-US" sz="1350" dirty="0"/>
-          </a:p>
-        </p:txBody>
-      </p:sp>
+        </p:spPr>
+      </p:pic>
     </p:spTree>
   </p:cSld>
   <p:clrMapOvr>
